--- a/decks/geog-weather-climate/geog-weather-climate_ch3_uk-roundabout.pptx
+++ b/decks/geog-weather-climate/geog-weather-climate_ch3_uk-roundabout.pptx
@@ -125,30 +125,30 @@
   <p:extLst>
     <p:ext uri="{521415D9-36F7-43E2-AB2F-B90AF26B5E84}">
       <p14:sectionLst xmlns:p14="http://schemas.microsoft.com/office/powerpoint/2010/main">
-        <p14:section name="Opening" id="{a862e866-d53a-4536-6aa9-5bad1b66a181}">
+        <p14:section name="Opening" id="{da350315-1d50-e32c-df2e-95f94904acaa}">
           <p14:sldIdLst>
             <p14:sldId id="256"/>
           </p14:sldIdLst>
         </p14:section>
-        <p14:section name="Gate" id="{7244ca44-f86c-d630-52d3-bf6ea5dc8dc3}">
+        <p14:section name="Gate" id="{43a30389-ad17-3774-86f6-932c5b030002}">
           <p14:sldIdLst>
             <p14:sldId id="257"/>
             <p14:sldId id="258"/>
           </p14:sldIdLst>
         </p14:section>
-        <p14:section name="Pre-teach" id="{922ed9a1-361d-0f93-8990-e7143382cb7c}">
+        <p14:section name="Pre-teach" id="{07c0dbce-a081-b1bc-59dd-eca2eec1b2c1}">
           <p14:sldIdLst>
             <p14:sldId id="259"/>
             <p14:sldId id="260"/>
           </p14:sldIdLst>
         </p14:section>
-        <p14:section name="Read-along" id="{81099ce3-08b2-f87c-828a-dd3debcedb65}">
+        <p14:section name="Read-along" id="{4daa7446-f7af-c168-6005-3d0aee59030a}">
           <p14:sldIdLst>
             <p14:sldId id="261"/>
             <p14:sldId id="262"/>
           </p14:sldIdLst>
         </p14:section>
-        <p14:section name="Teach" id="{c33c84f7-2e71-3c08-e2a2-81163e2ad6bd}">
+        <p14:section name="Teach" id="{c50c7889-cda5-8f39-6c5b-48c69f28564b}">
           <p14:sldIdLst>
             <p14:sldId id="263"/>
             <p14:sldId id="264"/>
@@ -156,7 +156,7 @@
             <p14:sldId id="266"/>
           </p14:sldIdLst>
         </p14:section>
-        <p14:section name="Routes" id="{f4e43c0d-92ab-9c5a-c363-d0021c24c5e0}">
+        <p14:section name="Routes" id="{284667e8-7423-a81d-f9db-d88e831c376b}">
           <p14:sldIdLst>
             <p14:sldId id="267"/>
             <p14:sldId id="268"/>
@@ -164,12 +164,12 @@
             <p14:sldId id="270"/>
           </p14:sldIdLst>
         </p14:section>
-        <p14:section name="Close" id="{f901ca77-f1c0-e568-8e6d-8faf5b2f7756}">
+        <p14:section name="Close" id="{0f541c58-5580-e9af-f4e0-347bc811f572}">
           <p14:sldIdLst>
             <p14:sldId id="271"/>
           </p14:sldIdLst>
         </p14:section>
-        <p14:section name="Answers" id="{75b85c34-cb21-400b-751c-bda6719c1f5f}">
+        <p14:section name="Answers" id="{232c086b-3a03-bc3f-5eed-30a90634ef81}">
           <p14:sldIdLst>
             <p14:sldId id="272"/>
             <p14:sldId id="273"/>
